--- a/docs/DerbyUp-Presentation.pptx
+++ b/docs/DerbyUp-Presentation.pptx
@@ -215,7 +215,7 @@
           <a:p>
             <a:fld id="{66DEF56E-4397-0041-9D65-EBD6922A8087}" type="datetimeFigureOut">
               <a:rPr lang="he-IL" smtClean="0"/>
-              <a:t>ט"ו.אלול.תשפ"ו</a:t>
+              <a:t>י"ז.אלול.תשפ"ו</a:t>
             </a:fld>
             <a:endParaRPr lang="he-IL"/>
           </a:p>
@@ -745,7 +745,7 @@
           <a:p>
             <a:fld id="{5BCAD085-E8A6-8845-BD4E-CB4CCA059FC4}" type="datetimeFigureOut">
               <a:rPr lang="en-US" smtClean="0"/>
-              <a:t>8/28/26</a:t>
+              <a:t>8/30/26</a:t>
             </a:fld>
             <a:endParaRPr lang="en-US"/>
           </a:p>
@@ -913,7 +913,7 @@
           <a:p>
             <a:fld id="{5BCAD085-E8A6-8845-BD4E-CB4CCA059FC4}" type="datetimeFigureOut">
               <a:rPr lang="en-US" smtClean="0"/>
-              <a:t>8/28/26</a:t>
+              <a:t>8/30/26</a:t>
             </a:fld>
             <a:endParaRPr lang="en-US"/>
           </a:p>
@@ -1091,7 +1091,7 @@
           <a:p>
             <a:fld id="{5BCAD085-E8A6-8845-BD4E-CB4CCA059FC4}" type="datetimeFigureOut">
               <a:rPr lang="en-US" smtClean="0"/>
-              <a:t>8/28/26</a:t>
+              <a:t>8/30/26</a:t>
             </a:fld>
             <a:endParaRPr lang="en-US"/>
           </a:p>
@@ -1517,7 +1517,7 @@
           <a:p>
             <a:fld id="{5BCAD085-E8A6-8845-BD4E-CB4CCA059FC4}" type="datetimeFigureOut">
               <a:rPr lang="en-US" smtClean="0"/>
-              <a:t>8/28/26</a:t>
+              <a:t>8/30/26</a:t>
             </a:fld>
             <a:endParaRPr lang="en-US"/>
           </a:p>
@@ -1762,7 +1762,7 @@
           <a:p>
             <a:fld id="{5BCAD085-E8A6-8845-BD4E-CB4CCA059FC4}" type="datetimeFigureOut">
               <a:rPr lang="en-US" smtClean="0"/>
-              <a:t>8/28/26</a:t>
+              <a:t>8/30/26</a:t>
             </a:fld>
             <a:endParaRPr lang="en-US"/>
           </a:p>
@@ -2047,7 +2047,7 @@
           <a:p>
             <a:fld id="{5BCAD085-E8A6-8845-BD4E-CB4CCA059FC4}" type="datetimeFigureOut">
               <a:rPr lang="en-US" smtClean="0"/>
-              <a:t>8/28/26</a:t>
+              <a:t>8/30/26</a:t>
             </a:fld>
             <a:endParaRPr lang="en-US"/>
           </a:p>
@@ -2466,7 +2466,7 @@
           <a:p>
             <a:fld id="{5BCAD085-E8A6-8845-BD4E-CB4CCA059FC4}" type="datetimeFigureOut">
               <a:rPr lang="en-US" smtClean="0"/>
-              <a:t>8/28/26</a:t>
+              <a:t>8/30/26</a:t>
             </a:fld>
             <a:endParaRPr lang="en-US"/>
           </a:p>
@@ -2583,7 +2583,7 @@
           <a:p>
             <a:fld id="{5BCAD085-E8A6-8845-BD4E-CB4CCA059FC4}" type="datetimeFigureOut">
               <a:rPr lang="en-US" smtClean="0"/>
-              <a:t>8/28/26</a:t>
+              <a:t>8/30/26</a:t>
             </a:fld>
             <a:endParaRPr lang="en-US"/>
           </a:p>
@@ -2678,7 +2678,7 @@
           <a:p>
             <a:fld id="{5BCAD085-E8A6-8845-BD4E-CB4CCA059FC4}" type="datetimeFigureOut">
               <a:rPr lang="en-US" smtClean="0"/>
-              <a:t>8/28/26</a:t>
+              <a:t>8/30/26</a:t>
             </a:fld>
             <a:endParaRPr lang="en-US"/>
           </a:p>
@@ -2953,7 +2953,7 @@
           <a:p>
             <a:fld id="{5BCAD085-E8A6-8845-BD4E-CB4CCA059FC4}" type="datetimeFigureOut">
               <a:rPr lang="en-US" smtClean="0"/>
-              <a:t>8/28/26</a:t>
+              <a:t>8/30/26</a:t>
             </a:fld>
             <a:endParaRPr lang="en-US"/>
           </a:p>
@@ -3205,7 +3205,7 @@
           <a:p>
             <a:fld id="{5BCAD085-E8A6-8845-BD4E-CB4CCA059FC4}" type="datetimeFigureOut">
               <a:rPr lang="en-US" smtClean="0"/>
-              <a:t>8/28/26</a:t>
+              <a:t>8/30/26</a:t>
             </a:fld>
             <a:endParaRPr lang="en-US"/>
           </a:p>
@@ -3416,7 +3416,7 @@
           <a:p>
             <a:fld id="{5BCAD085-E8A6-8845-BD4E-CB4CCA059FC4}" type="datetimeFigureOut">
               <a:rPr lang="en-US" smtClean="0"/>
-              <a:t>8/28/26</a:t>
+              <a:t>8/30/26</a:t>
             </a:fld>
             <a:endParaRPr lang="en-US"/>
           </a:p>
@@ -4282,26 +4282,6 @@
               <a:t> </a:t>
             </a:r>
             <a:r>
-              <a:rPr sz="2600" b="1" dirty="0" err="1">
-                <a:solidFill>
-                  <a:srgbClr val="111827"/>
-                </a:solidFill>
-                <a:latin typeface="Heebo"/>
-                <a:cs typeface="Heebo"/>
-              </a:rPr>
-              <a:t>לעבודה</a:t>
-            </a:r>
-            <a:r>
-              <a:rPr sz="2600" b="1" dirty="0">
-                <a:solidFill>
-                  <a:srgbClr val="111827"/>
-                </a:solidFill>
-                <a:latin typeface="Heebo"/>
-                <a:cs typeface="Heebo"/>
-              </a:rPr>
-              <a:t> </a:t>
-            </a:r>
-            <a:r>
               <a:rPr lang="he-IL" sz="2600" b="1" dirty="0">
                 <a:solidFill>
                   <a:srgbClr val="111827"/>
@@ -4401,14 +4381,14 @@
               </a:spcAft>
             </a:pPr>
             <a:r>
-              <a:rPr sz="1250" b="1" dirty="0" err="1">
-                <a:solidFill>
-                  <a:srgbClr val="111827"/>
-                </a:solidFill>
-                <a:latin typeface="Heebo"/>
-                <a:cs typeface="Heebo"/>
-              </a:rPr>
-              <a:t>הבעיה</a:t>
+              <a:rPr lang="he-IL" sz="1250" b="1" dirty="0">
+                <a:solidFill>
+                  <a:srgbClr val="111827"/>
+                </a:solidFill>
+                <a:latin typeface="Heebo"/>
+                <a:cs typeface="Heebo"/>
+              </a:rPr>
+              <a:t>הבעיה – למה יש ערך עסקי?</a:t>
             </a:r>
             <a:endParaRPr sz="1250" b="1" dirty="0">
               <a:solidFill>
@@ -5012,6 +4992,16 @@
               </a:rPr>
               <a:t>הפתרון</a:t>
             </a:r>
+            <a:r>
+              <a:rPr lang="he-IL" sz="1250" b="1" dirty="0">
+                <a:solidFill>
+                  <a:srgbClr val="111827"/>
+                </a:solidFill>
+                <a:latin typeface="Heebo"/>
+                <a:cs typeface="Heebo"/>
+              </a:rPr>
+              <a:t> – תהליכים מרכזיים במוצר</a:t>
+            </a:r>
             <a:endParaRPr sz="1250" b="1" dirty="0">
               <a:solidFill>
                 <a:srgbClr val="111827"/>
@@ -5407,7 +5397,7 @@
                 <a:latin typeface="Heebo"/>
                 <a:cs typeface="Heebo"/>
               </a:rPr>
-              <a:t> לגישור הפער למשתמשים פחות מעורבים</a:t>
+              <a:t> לעצות ״מקצועיות״ לניחושים</a:t>
             </a:r>
             <a:endParaRPr sz="1200" b="0" dirty="0">
               <a:solidFill>
@@ -6294,17 +6284,7 @@
                 <a:latin typeface="Heebo"/>
                 <a:cs typeface="Heebo"/>
               </a:rPr>
-              <a:t>פרטיות וציבוריות · 3 </a:t>
-            </a:r>
-            <a:r>
-              <a:rPr sz="1600" b="0" dirty="0" err="1">
-                <a:solidFill>
-                  <a:srgbClr val="111827"/>
-                </a:solidFill>
-                <a:latin typeface="Heebo"/>
-                <a:cs typeface="Heebo"/>
-              </a:rPr>
-              <a:t>ניחושים</a:t>
+              <a:t>פרטיות וציבוריות · 3 שאלות ניחוש</a:t>
             </a:r>
             <a:r>
               <a:rPr sz="1600" b="0" dirty="0">
@@ -8645,7 +8625,7 @@
         </p:nvSpPr>
         <p:spPr>
           <a:xfrm>
-            <a:off x="6233009" y="1944275"/>
+            <a:off x="6233007" y="1674309"/>
             <a:ext cx="5455767" cy="1484725"/>
           </a:xfrm>
           <a:prstGeom prst="roundRect">
@@ -8833,7 +8813,7 @@
         </p:nvSpPr>
         <p:spPr>
           <a:xfrm>
-            <a:off x="502922" y="1944276"/>
+            <a:off x="502920" y="1674310"/>
             <a:ext cx="5455767" cy="907307"/>
           </a:xfrm>
           <a:prstGeom prst="roundRect">
@@ -8955,7 +8935,7 @@
         </p:nvSpPr>
         <p:spPr>
           <a:xfrm>
-            <a:off x="6233009" y="3937197"/>
+            <a:off x="6233007" y="3667231"/>
             <a:ext cx="5455767" cy="1484725"/>
           </a:xfrm>
           <a:prstGeom prst="roundRect">
@@ -9173,7 +9153,7 @@
         </p:nvSpPr>
         <p:spPr>
           <a:xfrm>
-            <a:off x="502921" y="3229446"/>
+            <a:off x="502919" y="2959480"/>
             <a:ext cx="5455767" cy="907307"/>
           </a:xfrm>
           <a:prstGeom prst="roundRect">
@@ -9317,7 +9297,7 @@
         </p:nvSpPr>
         <p:spPr>
           <a:xfrm>
-            <a:off x="502920" y="4514615"/>
+            <a:off x="502918" y="4244649"/>
             <a:ext cx="5455767" cy="907307"/>
           </a:xfrm>
           <a:prstGeom prst="roundRect">
@@ -9494,66 +9474,6 @@
                 <a:cs typeface="Heebo"/>
               </a:rPr>
               <a:t>ארכיטקטורה</a:t>
-            </a:r>
-            <a:r>
-              <a:rPr sz="2600" b="1" dirty="0">
-                <a:solidFill>
-                  <a:srgbClr val="111827"/>
-                </a:solidFill>
-                <a:latin typeface="Heebo"/>
-                <a:cs typeface="Heebo"/>
-              </a:rPr>
-              <a:t> - </a:t>
-            </a:r>
-            <a:r>
-              <a:rPr sz="2600" b="1" dirty="0" err="1">
-                <a:solidFill>
-                  <a:srgbClr val="111827"/>
-                </a:solidFill>
-                <a:latin typeface="Heebo"/>
-                <a:cs typeface="Heebo"/>
-              </a:rPr>
-              <a:t>הכול</a:t>
-            </a:r>
-            <a:r>
-              <a:rPr sz="2600" b="1" dirty="0">
-                <a:solidFill>
-                  <a:srgbClr val="111827"/>
-                </a:solidFill>
-                <a:latin typeface="Heebo"/>
-                <a:cs typeface="Heebo"/>
-              </a:rPr>
-              <a:t> </a:t>
-            </a:r>
-            <a:r>
-              <a:rPr sz="2600" b="1" dirty="0" err="1">
-                <a:solidFill>
-                  <a:srgbClr val="111827"/>
-                </a:solidFill>
-                <a:latin typeface="Heebo"/>
-                <a:cs typeface="Heebo"/>
-              </a:rPr>
-              <a:t>בצד</a:t>
-            </a:r>
-            <a:r>
-              <a:rPr sz="2600" b="1" dirty="0">
-                <a:solidFill>
-                  <a:srgbClr val="111827"/>
-                </a:solidFill>
-                <a:latin typeface="Heebo"/>
-                <a:cs typeface="Heebo"/>
-              </a:rPr>
-              <a:t> </a:t>
-            </a:r>
-            <a:r>
-              <a:rPr sz="2600" b="1" dirty="0" err="1">
-                <a:solidFill>
-                  <a:srgbClr val="111827"/>
-                </a:solidFill>
-                <a:latin typeface="Heebo"/>
-                <a:cs typeface="Heebo"/>
-              </a:rPr>
-              <a:t>השרת</a:t>
             </a:r>
             <a:endParaRPr sz="2600" b="1" dirty="0">
               <a:solidFill>
@@ -9699,104 +9619,14 @@
               </a:spcAft>
             </a:pPr>
             <a:r>
-              <a:rPr sz="950" b="0" dirty="0">
-                <a:solidFill>
-                  <a:srgbClr val="5A6473"/>
-                </a:solidFill>
-                <a:latin typeface="Heebo"/>
-                <a:cs typeface="Heebo"/>
-              </a:rPr>
-              <a:t>12 </a:t>
-            </a:r>
-            <a:r>
-              <a:rPr sz="950" b="0" dirty="0" err="1">
-                <a:solidFill>
-                  <a:srgbClr val="5A6473"/>
-                </a:solidFill>
-                <a:latin typeface="Heebo"/>
-                <a:cs typeface="Heebo"/>
-              </a:rPr>
-              <a:t>ליבה</a:t>
-            </a:r>
-            <a:r>
-              <a:rPr sz="950" b="0" dirty="0">
-                <a:solidFill>
-                  <a:srgbClr val="5A6473"/>
-                </a:solidFill>
-                <a:latin typeface="Heebo"/>
-                <a:cs typeface="Heebo"/>
-              </a:rPr>
-              <a:t> + 6 </a:t>
-            </a:r>
-            <a:r>
-              <a:rPr sz="950" b="0" dirty="0" err="1">
-                <a:solidFill>
-                  <a:srgbClr val="5A6473"/>
-                </a:solidFill>
-                <a:latin typeface="Heebo"/>
-                <a:cs typeface="Heebo"/>
-              </a:rPr>
-              <a:t>של</a:t>
-            </a:r>
-            <a:r>
-              <a:rPr sz="950" b="0" dirty="0">
-                <a:solidFill>
-                  <a:srgbClr val="5A6473"/>
-                </a:solidFill>
-                <a:latin typeface="Heebo"/>
-                <a:cs typeface="Heebo"/>
-              </a:rPr>
-              <a:t> </a:t>
-            </a:r>
-            <a:r>
-              <a:rPr sz="950" b="0" dirty="0" err="1">
-                <a:solidFill>
-                  <a:srgbClr val="5A6473"/>
-                </a:solidFill>
-                <a:latin typeface="Heebo"/>
-                <a:cs typeface="Heebo"/>
-              </a:rPr>
-              <a:t>היועץ</a:t>
-            </a:r>
-            <a:r>
-              <a:rPr sz="950" b="0" dirty="0">
-                <a:solidFill>
-                  <a:srgbClr val="5A6473"/>
-                </a:solidFill>
-                <a:latin typeface="Heebo"/>
-                <a:cs typeface="Heebo"/>
-              </a:rPr>
-              <a:t>, </a:t>
-            </a:r>
-            <a:r>
-              <a:rPr sz="950" b="0" dirty="0" err="1">
-                <a:solidFill>
-                  <a:srgbClr val="5A6473"/>
-                </a:solidFill>
-                <a:latin typeface="Heebo"/>
-                <a:cs typeface="Heebo"/>
-              </a:rPr>
-              <a:t>בהפרדה</a:t>
-            </a:r>
-            <a:r>
-              <a:rPr sz="950" b="0" dirty="0">
-                <a:solidFill>
-                  <a:srgbClr val="5A6473"/>
-                </a:solidFill>
-                <a:latin typeface="Heebo"/>
-                <a:cs typeface="Heebo"/>
-              </a:rPr>
-              <a:t> </a:t>
-            </a:r>
-            <a:r>
-              <a:rPr sz="950" b="0" dirty="0" err="1">
-                <a:solidFill>
-                  <a:srgbClr val="5A6473"/>
-                </a:solidFill>
-                <a:latin typeface="Heebo"/>
-                <a:cs typeface="Heebo"/>
-              </a:rPr>
-              <a:t>מכוונת</a:t>
+              <a:rPr lang="he-IL" sz="950" b="0" dirty="0">
+                <a:solidFill>
+                  <a:srgbClr val="5A6473"/>
+                </a:solidFill>
+                <a:latin typeface="Heebo"/>
+                <a:cs typeface="Heebo"/>
+              </a:rPr>
+              <a:t>12 ליבה + 6 של היועץ בהפרדה מכוונת</a:t>
             </a:r>
             <a:endParaRPr sz="950" b="0" dirty="0">
               <a:solidFill>
@@ -11828,73 +11658,6 @@
           <a:chExt cx="0" cy="0"/>
         </a:xfrm>
       </p:grpSpPr>
-      <p:pic>
-        <p:nvPicPr>
-          <p:cNvPr id="2" name="Picture 1" descr="logo.png"/>
-          <p:cNvPicPr>
-            <a:picLocks noChangeAspect="1"/>
-          </p:cNvPicPr>
-          <p:nvPr/>
-        </p:nvPicPr>
-        <p:blipFill>
-          <a:blip r:embed="rId2"/>
-          <a:stretch>
-            <a:fillRect/>
-          </a:stretch>
-        </p:blipFill>
-        <p:spPr>
-          <a:xfrm>
-            <a:off x="502920" y="237744"/>
-            <a:ext cx="310896" cy="310896"/>
-          </a:xfrm>
-          <a:prstGeom prst="rect">
-            <a:avLst/>
-          </a:prstGeom>
-        </p:spPr>
-      </p:pic>
-      <p:sp>
-        <p:nvSpPr>
-          <p:cNvPr id="3" name="TextBox 2"/>
-          <p:cNvSpPr txBox="1"/>
-          <p:nvPr/>
-        </p:nvSpPr>
-        <p:spPr>
-          <a:xfrm>
-            <a:off x="886968" y="246888"/>
-            <a:ext cx="1463040" cy="320040"/>
-          </a:xfrm>
-          <a:prstGeom prst="rect">
-            <a:avLst/>
-          </a:prstGeom>
-          <a:noFill/>
-        </p:spPr>
-        <p:txBody>
-          <a:bodyPr wrap="square" lIns="0" tIns="0" rIns="0" bIns="0" anchor="t">
-            <a:spAutoFit/>
-          </a:bodyPr>
-          <a:lstStyle/>
-          <a:p>
-            <a:pPr algn="l">
-              <a:spcBef>
-                <a:spcPts val="0"/>
-              </a:spcBef>
-              <a:spcAft>
-                <a:spcPts val="400"/>
-              </a:spcAft>
-            </a:pPr>
-            <a:r>
-              <a:rPr sz="1300" b="1">
-                <a:solidFill>
-                  <a:srgbClr val="111827"/>
-                </a:solidFill>
-                <a:latin typeface="Heebo"/>
-                <a:cs typeface="Heebo"/>
-              </a:rPr>
-              <a:t>DerbyUp</a:t>
-            </a:r>
-          </a:p>
-        </p:txBody>
-      </p:sp>
       <p:sp>
         <p:nvSpPr>
           <p:cNvPr id="5" name="TextBox 4"/>
@@ -12885,28 +12648,25 @@
                 <a:latin typeface="Heebo"/>
                 <a:cs typeface="Heebo"/>
               </a:rPr>
-              <a:t>מחיקת עונות ישנות</a:t>
-            </a:r>
-          </a:p>
-          <a:p>
-            <a:pPr algn="ctr" rtl="1">
-              <a:spcBef>
-                <a:spcPts val="0"/>
-              </a:spcBef>
-              <a:spcAft>
-                <a:spcPts val="300"/>
-              </a:spcAft>
-            </a:pPr>
-            <a:r>
-              <a:rPr lang="he-IL" sz="1100" dirty="0">
-                <a:solidFill>
-                  <a:srgbClr val="111827"/>
-                </a:solidFill>
-                <a:latin typeface="Heebo"/>
-                <a:cs typeface="Heebo"/>
-              </a:rPr>
-              <a:t>פריסת שרתים רב אזורית</a:t>
-            </a:r>
+              <a:t>מחיקת </a:t>
+            </a:r>
+            <a:r>
+              <a:rPr lang="he-IL" sz="1100">
+                <a:solidFill>
+                  <a:srgbClr val="111827"/>
+                </a:solidFill>
+                <a:latin typeface="Heebo"/>
+                <a:cs typeface="Heebo"/>
+              </a:rPr>
+              <a:t>עונות ישנות</a:t>
+            </a:r>
+            <a:endParaRPr lang="he-IL" sz="1100" dirty="0">
+              <a:solidFill>
+                <a:srgbClr val="111827"/>
+              </a:solidFill>
+              <a:latin typeface="Heebo"/>
+              <a:cs typeface="Heebo"/>
+            </a:endParaRPr>
           </a:p>
         </p:txBody>
       </p:sp>
